--- a/media/exports/reports/2026-07/growth-services.pptx
+++ b/media/exports/reports/2026-07/growth-services.pptx
@@ -240,70 +240,70 @@
                 <c:formatCode>$#,##0;[Red]($#,##0);"-"</c:formatCode>
                 <c:ptCount val="22"/>
                 <c:pt idx="0">
-                  <c:v>94520</c:v>
+                  <c:v>103550</c:v>
                 </c:pt>
                 <c:pt idx="1">
-                  <c:v>108140</c:v>
+                  <c:v>118390</c:v>
                 </c:pt>
                 <c:pt idx="2">
-                  <c:v>114895</c:v>
+                  <c:v>125715</c:v>
                 </c:pt>
                 <c:pt idx="3">
-                  <c:v>88250</c:v>
+                  <c:v>96560</c:v>
                 </c:pt>
                 <c:pt idx="4">
-                  <c:v>111010</c:v>
+                  <c:v>121275</c:v>
                 </c:pt>
                 <c:pt idx="5">
-                  <c:v>77175</c:v>
+                  <c:v>84340</c:v>
                 </c:pt>
                 <c:pt idx="6">
-                  <c:v>63970</c:v>
+                  <c:v>69985</c:v>
                 </c:pt>
                 <c:pt idx="7">
-                  <c:v>95555</c:v>
+                  <c:v>104970</c:v>
                 </c:pt>
                 <c:pt idx="8">
-                  <c:v>90220</c:v>
+                  <c:v>99060</c:v>
                 </c:pt>
                 <c:pt idx="9">
-                  <c:v>86320</c:v>
+                  <c:v>94805</c:v>
                 </c:pt>
                 <c:pt idx="10">
-                  <c:v>61475</c:v>
+                  <c:v>67745</c:v>
                 </c:pt>
                 <c:pt idx="11">
-                  <c:v>59535</c:v>
+                  <c:v>65650</c:v>
                 </c:pt>
                 <c:pt idx="12">
-                  <c:v>71260</c:v>
+                  <c:v>78550</c:v>
                 </c:pt>
                 <c:pt idx="13">
-                  <c:v>83940</c:v>
+                  <c:v>92575</c:v>
                 </c:pt>
                 <c:pt idx="14">
-                  <c:v>69420</c:v>
+                  <c:v>76600</c:v>
                 </c:pt>
                 <c:pt idx="15">
-                  <c:v>92370</c:v>
+                  <c:v>102350</c:v>
                 </c:pt>
                 <c:pt idx="16">
-                  <c:v>100055</c:v>
+                  <c:v>110835</c:v>
                 </c:pt>
                 <c:pt idx="17">
-                  <c:v>109865</c:v>
+                  <c:v>121215</c:v>
                 </c:pt>
                 <c:pt idx="18">
-                  <c:v>80590</c:v>
+                  <c:v>88665</c:v>
                 </c:pt>
                 <c:pt idx="19">
-                  <c:v>77090</c:v>
+                  <c:v>84920</c:v>
                 </c:pt>
                 <c:pt idx="20">
-                  <c:v>115550</c:v>
+                  <c:v>127580</c:v>
                 </c:pt>
                 <c:pt idx="21">
-                  <c:v>120755</c:v>
+                  <c:v>133455</c:v>
                 </c:pt>
               </c:numCache>
             </c:numRef>
@@ -387,7 +387,7 @@
         <c:crossAx val="-2101159928"/>
         <c:crosses val="autoZero"/>
         <c:crossBetween val="midCat"/>
-        <c:majorUnit val="25000.0"/>
+        <c:majorUnit val="50000.0"/>
       </c:valAx>
     </c:plotArea>
     <c:plotVisOnly val="1"/>
@@ -540,70 +540,70 @@
                 <c:formatCode>$#,##0;[Red]($#,##0);"-"</c:formatCode>
                 <c:ptCount val="22"/>
                 <c:pt idx="0">
-                  <c:v>70720</c:v>
+                  <c:v>77350</c:v>
                 </c:pt>
                 <c:pt idx="1">
-                  <c:v>88540</c:v>
+                  <c:v>96790</c:v>
                 </c:pt>
                 <c:pt idx="2">
-                  <c:v>94695</c:v>
+                  <c:v>103515</c:v>
                 </c:pt>
                 <c:pt idx="3">
-                  <c:v>66850</c:v>
+                  <c:v>73060</c:v>
                 </c:pt>
                 <c:pt idx="4">
-                  <c:v>84410</c:v>
+                  <c:v>92075</c:v>
                 </c:pt>
                 <c:pt idx="5">
-                  <c:v>48975</c:v>
+                  <c:v>53340</c:v>
                 </c:pt>
                 <c:pt idx="6">
-                  <c:v>37570</c:v>
+                  <c:v>40885</c:v>
                 </c:pt>
                 <c:pt idx="7">
-                  <c:v>59755</c:v>
+                  <c:v>65570</c:v>
                 </c:pt>
                 <c:pt idx="8">
-                  <c:v>64520</c:v>
+                  <c:v>70760</c:v>
                 </c:pt>
                 <c:pt idx="9">
-                  <c:v>64820</c:v>
+                  <c:v>71205</c:v>
                 </c:pt>
                 <c:pt idx="10">
-                  <c:v>38775</c:v>
+                  <c:v>42845</c:v>
                 </c:pt>
                 <c:pt idx="11">
-                  <c:v>38035</c:v>
+                  <c:v>42050</c:v>
                 </c:pt>
                 <c:pt idx="12">
-                  <c:v>45860</c:v>
+                  <c:v>50650</c:v>
                 </c:pt>
                 <c:pt idx="13">
-                  <c:v>46840</c:v>
+                  <c:v>51775</c:v>
                 </c:pt>
                 <c:pt idx="14">
-                  <c:v>29520</c:v>
+                  <c:v>32800</c:v>
                 </c:pt>
                 <c:pt idx="15">
-                  <c:v>60170</c:v>
+                  <c:v>66950</c:v>
                 </c:pt>
                 <c:pt idx="16">
-                  <c:v>62955</c:v>
+                  <c:v>70035</c:v>
                 </c:pt>
                 <c:pt idx="17">
-                  <c:v>75165</c:v>
+                  <c:v>83115</c:v>
                 </c:pt>
                 <c:pt idx="18">
-                  <c:v>47090</c:v>
+                  <c:v>51865</c:v>
                 </c:pt>
                 <c:pt idx="19">
-                  <c:v>43590</c:v>
+                  <c:v>48120</c:v>
                 </c:pt>
                 <c:pt idx="20">
-                  <c:v>76650</c:v>
+                  <c:v>84880</c:v>
                 </c:pt>
                 <c:pt idx="21">
-                  <c:v>79455</c:v>
+                  <c:v>88055</c:v>
                 </c:pt>
               </c:numCache>
             </c:numRef>
@@ -652,7 +652,7 @@
         <c:axId val="-2100718248"/>
         <c:scaling>
           <c:orientation val="minMax"/>
-          <c:max val="100000.0"/>
+          <c:max val="125000.0"/>
           <c:min val="0.0"/>
         </c:scaling>
         <c:delete val="0"/>
@@ -687,7 +687,7 @@
         <c:crossAx val="-2101159928"/>
         <c:crosses val="autoZero"/>
         <c:crossBetween val="midCat"/>
-        <c:majorUnit val="20000.0"/>
+        <c:majorUnit val="25000.0"/>
       </c:valAx>
     </c:plotArea>
     <c:plotVisOnly val="1"/>
@@ -840,70 +840,70 @@
                 <c:formatCode>$#,##0;[Red]($#,##0);"-"</c:formatCode>
                 <c:ptCount val="22"/>
                 <c:pt idx="0">
-                  <c:v>15000</c:v>
+                  <c:v>16500</c:v>
                 </c:pt>
                 <c:pt idx="1">
-                  <c:v>15000</c:v>
+                  <c:v>16500</c:v>
                 </c:pt>
                 <c:pt idx="2">
-                  <c:v>15000</c:v>
+                  <c:v>16500</c:v>
                 </c:pt>
                 <c:pt idx="3">
-                  <c:v>15000</c:v>
+                  <c:v>16500</c:v>
                 </c:pt>
                 <c:pt idx="4">
-                  <c:v>15000</c:v>
+                  <c:v>16500</c:v>
                 </c:pt>
                 <c:pt idx="5">
-                  <c:v>21800</c:v>
+                  <c:v>24000</c:v>
                 </c:pt>
                 <c:pt idx="6">
-                  <c:v>21800</c:v>
+                  <c:v>24000</c:v>
                 </c:pt>
                 <c:pt idx="7">
-                  <c:v>21800</c:v>
+                  <c:v>24000</c:v>
                 </c:pt>
                 <c:pt idx="8">
-                  <c:v>21800</c:v>
+                  <c:v>24000</c:v>
                 </c:pt>
                 <c:pt idx="9">
-                  <c:v>16300</c:v>
+                  <c:v>17900</c:v>
                 </c:pt>
                 <c:pt idx="10">
-                  <c:v>16300</c:v>
+                  <c:v>17900</c:v>
                 </c:pt>
                 <c:pt idx="11">
-                  <c:v>16300</c:v>
+                  <c:v>17900</c:v>
                 </c:pt>
                 <c:pt idx="12">
-                  <c:v>16300</c:v>
+                  <c:v>17900</c:v>
                 </c:pt>
                 <c:pt idx="13">
-                  <c:v>28300</c:v>
+                  <c:v>31100</c:v>
                 </c:pt>
                 <c:pt idx="14">
-                  <c:v>28300</c:v>
+                  <c:v>31100</c:v>
                 </c:pt>
                 <c:pt idx="15">
-                  <c:v>28300</c:v>
+                  <c:v>31100</c:v>
                 </c:pt>
                 <c:pt idx="16">
-                  <c:v>28300</c:v>
+                  <c:v>31100</c:v>
                 </c:pt>
                 <c:pt idx="17">
-                  <c:v>28300</c:v>
+                  <c:v>31100</c:v>
                 </c:pt>
                 <c:pt idx="18">
-                  <c:v>28300</c:v>
+                  <c:v>31100</c:v>
                 </c:pt>
                 <c:pt idx="19">
-                  <c:v>28300</c:v>
+                  <c:v>31100</c:v>
                 </c:pt>
                 <c:pt idx="20">
-                  <c:v>32500</c:v>
+                  <c:v>35700</c:v>
                 </c:pt>
                 <c:pt idx="21">
-                  <c:v>32500</c:v>
+                  <c:v>35700</c:v>
                 </c:pt>
               </c:numCache>
             </c:numRef>
@@ -1140,70 +1140,70 @@
                 <c:formatCode>$#,##0;[Red]($#,##0);"-"</c:formatCode>
                 <c:ptCount val="22"/>
                 <c:pt idx="0">
-                  <c:v>8800</c:v>
+                  <c:v>9700</c:v>
                 </c:pt>
                 <c:pt idx="1">
-                  <c:v>4600</c:v>
+                  <c:v>5100</c:v>
                 </c:pt>
                 <c:pt idx="2">
-                  <c:v>5200</c:v>
+                  <c:v>5700</c:v>
                 </c:pt>
                 <c:pt idx="3">
-                  <c:v>6400</c:v>
+                  <c:v>7000</c:v>
                 </c:pt>
                 <c:pt idx="4">
-                  <c:v>11600</c:v>
+                  <c:v>12700</c:v>
                 </c:pt>
                 <c:pt idx="5">
-                  <c:v>6400</c:v>
+                  <c:v>7000</c:v>
                 </c:pt>
                 <c:pt idx="6">
-                  <c:v>4600</c:v>
+                  <c:v>5100</c:v>
                 </c:pt>
                 <c:pt idx="7">
-                  <c:v>14000</c:v>
+                  <c:v>15400</c:v>
                 </c:pt>
                 <c:pt idx="8">
-                  <c:v>3900</c:v>
+                  <c:v>4300</c:v>
                 </c:pt>
                 <c:pt idx="9">
-                  <c:v>5200</c:v>
+                  <c:v>5700</c:v>
                 </c:pt>
                 <c:pt idx="10">
-                  <c:v>6400</c:v>
+                  <c:v>7000</c:v>
                 </c:pt>
                 <c:pt idx="11">
-                  <c:v>5200</c:v>
+                  <c:v>5700</c:v>
                 </c:pt>
                 <c:pt idx="12">
-                  <c:v>9100</c:v>
+                  <c:v>10000</c:v>
                 </c:pt>
                 <c:pt idx="13">
-                  <c:v>8800</c:v>
+                  <c:v>9700</c:v>
                 </c:pt>
                 <c:pt idx="14">
-                  <c:v>11600</c:v>
+                  <c:v>12700</c:v>
                 </c:pt>
                 <c:pt idx="15">
-                  <c:v>3900</c:v>
+                  <c:v>4300</c:v>
                 </c:pt>
                 <c:pt idx="16">
-                  <c:v>8800</c:v>
+                  <c:v>9700</c:v>
                 </c:pt>
                 <c:pt idx="17">
-                  <c:v>6400</c:v>
+                  <c:v>7000</c:v>
                 </c:pt>
                 <c:pt idx="18">
-                  <c:v>5200</c:v>
+                  <c:v>5700</c:v>
                 </c:pt>
                 <c:pt idx="19">
-                  <c:v>5200</c:v>
+                  <c:v>5700</c:v>
                 </c:pt>
                 <c:pt idx="20">
-                  <c:v>6400</c:v>
+                  <c:v>7000</c:v>
                 </c:pt>
                 <c:pt idx="21">
-                  <c:v>8800</c:v>
+                  <c:v>9700</c:v>
                 </c:pt>
               </c:numCache>
             </c:numRef>
@@ -1252,7 +1252,7 @@
         <c:axId val="-2100718248"/>
         <c:scaling>
           <c:orientation val="minMax"/>
-          <c:max val="15000.0"/>
+          <c:max val="20000.0"/>
           <c:min val="0.0"/>
         </c:scaling>
         <c:delete val="0"/>
@@ -1777,7 +1777,7 @@
           <a:lstStyle/>
           <a:p>
             <a:r>
-              <a:t>Services · All. July against July last year: 39.9%; Year to date against the same period last year: 39.9%; Gross margin, year to date: 60.5%. Revenue is 39.9% up on the same period last year, year to date ($120,755 against $86,320). Training makes the highest gross margin (69.3%); Projects the lowest (59.6%). The business needs 46.9% gross margin just to cover overheads. Projects: 59.6% gross margin, 19.6 points over the 40.0% target ($15,593 ahead on $79,455 this financial year to date). Training: 69.3% gross margin, 29.3 points over the 40.0% target ($2,580 ahead on $8,800 this financial year to date).</a:t>
+              <a:t>Services · All. July against July last year: 40.8%; Year to date against the same period last year: 40.8%; Gross margin, year to date: 64.3%. Revenue is 40.8% up on the same period last year, year to date ($133,455 against $94,805). Training makes the highest gross margin (72.2%); Projects the lowest (63.6%). The business needs 54.8% gross margin just to cover overheads. Projects: 63.6% gross margin, 23.6 points over the 40.0% target ($20,753 ahead on $88,055 this financial year to date). Training: 72.2% gross margin, 32.2 points over the 40.0% target ($3,120 ahead on $9,700 this financial year to date).</a:t>
             </a:r>
           </a:p>
         </p:txBody>
@@ -1847,7 +1847,7 @@
           <a:lstStyle/>
           <a:p>
             <a:r>
-              <a:t>Services · Projects. July against July last year: 22.6%; Year to date against the same period last year: 22.6%; Gross margin, year to date: 59.6%. Projects brought in $79,455 this financial year to date, 22.6% on the same period last year (slower than the business as a whole, 39.9%), at a 59.6% gross margin (below the 60.5% overall). Projects: 59.6% gross margin, 19.6 points over the 40.0% target ($15,593 ahead on $79,455 this financial year to date).</a:t>
+              <a:t>Services · Projects. July against July last year: 23.7%; Year to date against the same period last year: 23.7%; Gross margin, year to date: 63.6%. Projects brought in $88,055 this financial year to date, 23.7% on the same period last year (slower than the business as a whole, 40.8%), at a 63.6% gross margin (below the 64.3% overall). Projects: 63.6% gross margin, 23.6 points over the 40.0% target ($20,753 ahead on $88,055 this financial year to date).</a:t>
             </a:r>
           </a:p>
         </p:txBody>
@@ -1917,7 +1917,7 @@
           <a:lstStyle/>
           <a:p>
             <a:r>
-              <a:t>Services · Retainers. July against July last year: 99.4%; Year to date against the same period last year: 99.4%; Gross margin, year to date: 60.3%. Retainers brought in $32,500 this financial year to date, 99.4% on the same period last year (faster than the business as a whole, 39.9%), at a 60.3% gross margin (below the 60.5% overall). Retainers: 60.3% gross margin, 20.3 points over the 40.0% target ($6,600 ahead on $32,500 this financial year to date).</a:t>
+              <a:t>Services · Retainers. July against July last year: 99.4%; Year to date against the same period last year: 99.4%; Gross margin, year to date: 63.9%. Retainers brought in $35,700 this financial year to date, 99.4% on the same period last year (faster than the business as a whole, 40.8%), at a 63.9% gross margin (below the 64.3% overall). Retainers: 63.9% gross margin, 23.9 points over the 40.0% target ($8,520 ahead on $35,700 this financial year to date).</a:t>
             </a:r>
           </a:p>
         </p:txBody>
@@ -1987,7 +1987,7 @@
           <a:lstStyle/>
           <a:p>
             <a:r>
-              <a:t>Services · Training. July against July last year: 69.2%; Year to date against the same period last year: 69.2%; Gross margin, year to date: 69.3%. Training brought in $8,800 this financial year to date, 69.2% on the same period last year (faster than the business as a whole, 39.9%), at a 69.3% gross margin (above the 60.5% overall). Training: 69.3% gross margin, 29.3 points over the 40.0% target ($2,580 ahead on $8,800 this financial year to date).</a:t>
+              <a:t>Services · Training. July against July last year: 70.2%; Year to date against the same period last year: 70.2%; Gross margin, year to date: 72.2%. Training brought in $9,700 this financial year to date, 70.2% on the same period last year (faster than the business as a whole, 40.8%), at a 72.2% gross margin (above the 64.3% overall). Training: 72.2% gross margin, 32.2 points over the 40.0% target ($3,120 ahead on $9,700 this financial year to date).</a:t>
             </a:r>
           </a:p>
         </p:txBody>
@@ -2057,7 +2057,7 @@
           <a:lstStyle/>
           <a:p>
             <a:r>
-              <a:t>By type of work: financial year to date (Jul 2026) against the same period last year · Services. From gross margin to profit: July's client work made $73,075 gross margin (60.5%). Consultant time not charged to client work took $4,620 and overheads $52,050, leaving $16,405 profit before tax (13.6% of revenue). To cover overheads, client work needs a 46.9% gross margin on average.</a:t>
+              <a:t>By type of work: financial year to date (Jul 2026) against the same period last year · Services. From gross margin to profit: July's client work made $85,775 gross margin (64.3%). Consultant time not charged to client work took $21,048 and overheads $52,050, leaving $12,677 profit before tax (9.5% of revenue). To cover overheads, client work needs a 54.8% gross margin on average.</a:t>
             </a:r>
           </a:p>
         </p:txBody>
@@ -5472,7 +5472,7 @@
                 </a:solidFill>
                 <a:latin typeface="Roboto"/>
               </a:rPr>
-              <a:t>Data retrieved 2pm, Tue 6 Oct 2026 · Generated 8 Oct 2026, 9:35am · Sample data · Made with Python (python-pptx)</a:t>
+              <a:t>Data retrieved 2pm, Tue 6 Oct 2026 · Generated 9 Oct 2026, 8:41am · Sample data · Made with Python (python-pptx)</a:t>
             </a:r>
           </a:p>
         </p:txBody>
@@ -5818,7 +5818,7 @@
                 </a:solidFill>
                 <a:latin typeface="Roboto"/>
               </a:rPr>
-              <a:t>39.9%</a:t>
+              <a:t>40.8%</a:t>
             </a:r>
           </a:p>
         </p:txBody>
@@ -5857,7 +5857,7 @@
                 </a:solidFill>
                 <a:latin typeface="Roboto"/>
               </a:rPr>
-              <a:t>$120,755 against $86,320</a:t>
+              <a:t>$133,455 against $94,805</a:t>
             </a:r>
           </a:p>
         </p:txBody>
@@ -5984,7 +5984,7 @@
                 </a:solidFill>
                 <a:latin typeface="Roboto"/>
               </a:rPr>
-              <a:t>39.9%</a:t>
+              <a:t>40.8%</a:t>
             </a:r>
           </a:p>
         </p:txBody>
@@ -6023,7 +6023,7 @@
                 </a:solidFill>
                 <a:latin typeface="Roboto"/>
               </a:rPr>
-              <a:t>$120,755 against $86,320</a:t>
+              <a:t>$133,455 against $94,805</a:t>
             </a:r>
           </a:p>
         </p:txBody>
@@ -6150,7 +6150,7 @@
                 </a:solidFill>
                 <a:latin typeface="Roboto"/>
               </a:rPr>
-              <a:t>60.5%</a:t>
+              <a:t>64.3%</a:t>
             </a:r>
           </a:p>
         </p:txBody>
@@ -6189,7 +6189,7 @@
                 </a:solidFill>
                 <a:latin typeface="Roboto"/>
               </a:rPr>
-              <a:t>$73,075 before overheads</a:t>
+              <a:t>$85,775 before overheads</a:t>
             </a:r>
           </a:p>
         </p:txBody>
@@ -6334,7 +6334,7 @@
                 </a:solidFill>
                 <a:latin typeface="Roboto"/>
               </a:rPr>
-              <a:t>Revenue is 39.9% up on the same period last year, year to date ($120,755 against $86,320). Training makes the highest gross margin (69.3%); Projects the lowest (59.6%). The business needs 46.9% gross margin just to cover overheads.</a:t>
+              <a:t>Revenue is 40.8% up on the same period last year, year to date ($133,455 against $94,805). Training makes the highest gross margin (72.2%); Projects the lowest (63.6%). The business needs 54.8% gross margin just to cover overheads.</a:t>
             </a:r>
           </a:p>
         </p:txBody>
@@ -6461,7 +6461,7 @@
                 </a:solidFill>
                 <a:latin typeface="Roboto"/>
               </a:rPr>
-              <a:t>Projects: 59.6% gross margin, 19.6 points over the 40.0% target ($15,593 ahead on $79,455 this financial year to date). Training: 69.3% gross margin, 29.3 points over the 40.0% target ($2,580 ahead on $8,800 this financial year to date).</a:t>
+              <a:t>Projects: 63.6% gross margin, 23.6 points over the 40.0% target ($20,753 ahead on $88,055 this financial year to date). Training: 72.2% gross margin, 32.2 points over the 40.0% target ($3,120 ahead on $9,700 this financial year to date).</a:t>
             </a:r>
           </a:p>
         </p:txBody>
@@ -6539,7 +6539,7 @@
                 </a:solidFill>
                 <a:latin typeface="Roboto"/>
               </a:rPr>
-              <a:t>Data retrieved 2pm, Tue 6 Oct 2026 · Generated 8 Oct 2026, 9:35am · Sample data · Made with Python (python-pptx)</a:t>
+              <a:t>Data retrieved 2pm, Tue 6 Oct 2026 · Generated 9 Oct 2026, 8:41am · Sample data · Made with Python (python-pptx)</a:t>
             </a:r>
           </a:p>
         </p:txBody>
@@ -6885,7 +6885,7 @@
                 </a:solidFill>
                 <a:latin typeface="Roboto"/>
               </a:rPr>
-              <a:t>22.6%</a:t>
+              <a:t>23.7%</a:t>
             </a:r>
           </a:p>
         </p:txBody>
@@ -6924,7 +6924,7 @@
                 </a:solidFill>
                 <a:latin typeface="Roboto"/>
               </a:rPr>
-              <a:t>$79,455 against $64,820</a:t>
+              <a:t>$88,055 against $71,205</a:t>
             </a:r>
           </a:p>
         </p:txBody>
@@ -7051,7 +7051,7 @@
                 </a:solidFill>
                 <a:latin typeface="Roboto"/>
               </a:rPr>
-              <a:t>22.6%</a:t>
+              <a:t>23.7%</a:t>
             </a:r>
           </a:p>
         </p:txBody>
@@ -7090,7 +7090,7 @@
                 </a:solidFill>
                 <a:latin typeface="Roboto"/>
               </a:rPr>
-              <a:t>$79,455 against $64,820</a:t>
+              <a:t>$88,055 against $71,205</a:t>
             </a:r>
           </a:p>
         </p:txBody>
@@ -7217,7 +7217,7 @@
                 </a:solidFill>
                 <a:latin typeface="Roboto"/>
               </a:rPr>
-              <a:t>59.6%</a:t>
+              <a:t>63.6%</a:t>
             </a:r>
           </a:p>
         </p:txBody>
@@ -7256,7 +7256,7 @@
                 </a:solidFill>
                 <a:latin typeface="Roboto"/>
               </a:rPr>
-              <a:t>$47,375 before overheads</a:t>
+              <a:t>$55,975 before overheads</a:t>
             </a:r>
           </a:p>
         </p:txBody>
@@ -7401,7 +7401,7 @@
                 </a:solidFill>
                 <a:latin typeface="Roboto"/>
               </a:rPr>
-              <a:t>Projects brought in $79,455 this financial year to date, 22.6% on the same period last year (slower than the business as a whole, 39.9%), at a 59.6% gross margin (below the 60.5% overall).</a:t>
+              <a:t>Projects brought in $88,055 this financial year to date, 23.7% on the same period last year (slower than the business as a whole, 40.8%), at a 63.6% gross margin (below the 64.3% overall).</a:t>
             </a:r>
           </a:p>
         </p:txBody>
@@ -7528,7 +7528,7 @@
                 </a:solidFill>
                 <a:latin typeface="Roboto"/>
               </a:rPr>
-              <a:t>Projects: 59.6% gross margin, 19.6 points over the 40.0% target ($15,593 ahead on $79,455 this financial year to date).</a:t>
+              <a:t>Projects: 63.6% gross margin, 23.6 points over the 40.0% target ($20,753 ahead on $88,055 this financial year to date).</a:t>
             </a:r>
           </a:p>
         </p:txBody>
@@ -7606,7 +7606,7 @@
                 </a:solidFill>
                 <a:latin typeface="Roboto"/>
               </a:rPr>
-              <a:t>Data retrieved 2pm, Tue 6 Oct 2026 · Generated 8 Oct 2026, 9:35am · Sample data · Made with Python (python-pptx)</a:t>
+              <a:t>Data retrieved 2pm, Tue 6 Oct 2026 · Generated 9 Oct 2026, 8:41am · Sample data · Made with Python (python-pptx)</a:t>
             </a:r>
           </a:p>
         </p:txBody>
@@ -7991,7 +7991,7 @@
                 </a:solidFill>
                 <a:latin typeface="Roboto"/>
               </a:rPr>
-              <a:t>$32,500 against $16,300</a:t>
+              <a:t>$35,700 against $17,900</a:t>
             </a:r>
           </a:p>
         </p:txBody>
@@ -8157,7 +8157,7 @@
                 </a:solidFill>
                 <a:latin typeface="Roboto"/>
               </a:rPr>
-              <a:t>$32,500 against $16,300</a:t>
+              <a:t>$35,700 against $17,900</a:t>
             </a:r>
           </a:p>
         </p:txBody>
@@ -8284,7 +8284,7 @@
                 </a:solidFill>
                 <a:latin typeface="Roboto"/>
               </a:rPr>
-              <a:t>60.3%</a:t>
+              <a:t>63.9%</a:t>
             </a:r>
           </a:p>
         </p:txBody>
@@ -8323,7 +8323,7 @@
                 </a:solidFill>
                 <a:latin typeface="Roboto"/>
               </a:rPr>
-              <a:t>$19,600 before overheads</a:t>
+              <a:t>$22,800 before overheads</a:t>
             </a:r>
           </a:p>
         </p:txBody>
@@ -8468,7 +8468,7 @@
                 </a:solidFill>
                 <a:latin typeface="Roboto"/>
               </a:rPr>
-              <a:t>Retainers brought in $32,500 this financial year to date, 99.4% on the same period last year (faster than the business as a whole, 39.9%), at a 60.3% gross margin (below the 60.5% overall).</a:t>
+              <a:t>Retainers brought in $35,700 this financial year to date, 99.4% on the same period last year (faster than the business as a whole, 40.8%), at a 63.9% gross margin (below the 64.3% overall).</a:t>
             </a:r>
           </a:p>
         </p:txBody>
@@ -8595,7 +8595,7 @@
                 </a:solidFill>
                 <a:latin typeface="Roboto"/>
               </a:rPr>
-              <a:t>Retainers: 60.3% gross margin, 20.3 points over the 40.0% target ($6,600 ahead on $32,500 this financial year to date).</a:t>
+              <a:t>Retainers: 63.9% gross margin, 23.9 points over the 40.0% target ($8,520 ahead on $35,700 this financial year to date).</a:t>
             </a:r>
           </a:p>
         </p:txBody>
@@ -8673,7 +8673,7 @@
                 </a:solidFill>
                 <a:latin typeface="Roboto"/>
               </a:rPr>
-              <a:t>Data retrieved 2pm, Tue 6 Oct 2026 · Generated 8 Oct 2026, 9:35am · Sample data · Made with Python (python-pptx)</a:t>
+              <a:t>Data retrieved 2pm, Tue 6 Oct 2026 · Generated 9 Oct 2026, 8:41am · Sample data · Made with Python (python-pptx)</a:t>
             </a:r>
           </a:p>
         </p:txBody>
@@ -9019,7 +9019,7 @@
                 </a:solidFill>
                 <a:latin typeface="Roboto"/>
               </a:rPr>
-              <a:t>69.2%</a:t>
+              <a:t>70.2%</a:t>
             </a:r>
           </a:p>
         </p:txBody>
@@ -9058,7 +9058,7 @@
                 </a:solidFill>
                 <a:latin typeface="Roboto"/>
               </a:rPr>
-              <a:t>$8,800 against $5,200</a:t>
+              <a:t>$9,700 against $5,700</a:t>
             </a:r>
           </a:p>
         </p:txBody>
@@ -9185,7 +9185,7 @@
                 </a:solidFill>
                 <a:latin typeface="Roboto"/>
               </a:rPr>
-              <a:t>69.2%</a:t>
+              <a:t>70.2%</a:t>
             </a:r>
           </a:p>
         </p:txBody>
@@ -9224,7 +9224,7 @@
                 </a:solidFill>
                 <a:latin typeface="Roboto"/>
               </a:rPr>
-              <a:t>$8,800 against $5,200</a:t>
+              <a:t>$9,700 against $5,700</a:t>
             </a:r>
           </a:p>
         </p:txBody>
@@ -9351,7 +9351,7 @@
                 </a:solidFill>
                 <a:latin typeface="Roboto"/>
               </a:rPr>
-              <a:t>69.3%</a:t>
+              <a:t>72.2%</a:t>
             </a:r>
           </a:p>
         </p:txBody>
@@ -9390,7 +9390,7 @@
                 </a:solidFill>
                 <a:latin typeface="Roboto"/>
               </a:rPr>
-              <a:t>$6,100 before overheads</a:t>
+              <a:t>$7,000 before overheads</a:t>
             </a:r>
           </a:p>
         </p:txBody>
@@ -9535,7 +9535,7 @@
                 </a:solidFill>
                 <a:latin typeface="Roboto"/>
               </a:rPr>
-              <a:t>Training brought in $8,800 this financial year to date, 69.2% on the same period last year (faster than the business as a whole, 39.9%), at a 69.3% gross margin (above the 60.5% overall).</a:t>
+              <a:t>Training brought in $9,700 this financial year to date, 70.2% on the same period last year (faster than the business as a whole, 40.8%), at a 72.2% gross margin (above the 64.3% overall).</a:t>
             </a:r>
           </a:p>
         </p:txBody>
@@ -9662,7 +9662,7 @@
                 </a:solidFill>
                 <a:latin typeface="Roboto"/>
               </a:rPr>
-              <a:t>Training: 69.3% gross margin, 29.3 points over the 40.0% target ($2,580 ahead on $8,800 this financial year to date).</a:t>
+              <a:t>Training: 72.2% gross margin, 32.2 points over the 40.0% target ($3,120 ahead on $9,700 this financial year to date).</a:t>
             </a:r>
           </a:p>
         </p:txBody>
@@ -9740,7 +9740,7 @@
                 </a:solidFill>
                 <a:latin typeface="Roboto"/>
               </a:rPr>
-              <a:t>Data retrieved 2pm, Tue 6 Oct 2026 · Generated 8 Oct 2026, 9:35am · Sample data · Made with Python (python-pptx)</a:t>
+              <a:t>Data retrieved 2pm, Tue 6 Oct 2026 · Generated 9 Oct 2026, 8:41am · Sample data · Made with Python (python-pptx)</a:t>
             </a:r>
           </a:p>
         </p:txBody>
@@ -9959,7 +9959,7 @@
                 </a:solidFill>
                 <a:latin typeface="Roboto"/>
               </a:rPr>
-              <a:t>From gross margin to profit: July's client work made $73,075 gross margin (60.5%). Consultant time not charged to client work took $4,620 and overheads $52,050, leaving $16,405 profit before tax (13.6% of revenue). To cover overheads, client work needs a 46.9% gross margin on average.</a:t>
+              <a:t>From gross margin to profit: July's client work made $85,775 gross margin (64.3%). Consultant time not charged to client work took $21,048 and overheads $52,050, leaving $12,677 profit before tax (9.5% of revenue). To cover overheads, client work needs a 54.8% gross margin on average.</a:t>
             </a:r>
           </a:p>
         </p:txBody>
@@ -10190,7 +10190,7 @@
                           </a:solidFill>
                           <a:latin typeface="Roboto"/>
                         </a:rPr>
-                        <a:t>$79,455</a:t>
+                        <a:t>$88,055</a:t>
                       </a:r>
                     </a:p>
                   </a:txBody>
@@ -10217,7 +10217,7 @@
                           </a:solidFill>
                           <a:latin typeface="Roboto"/>
                         </a:rPr>
-                        <a:t>$64,820</a:t>
+                        <a:t>$71,205</a:t>
                       </a:r>
                     </a:p>
                   </a:txBody>
@@ -10244,7 +10244,7 @@
                           </a:solidFill>
                           <a:latin typeface="Roboto"/>
                         </a:rPr>
-                        <a:t>22.6%</a:t>
+                        <a:t>23.7%</a:t>
                       </a:r>
                     </a:p>
                   </a:txBody>
@@ -10271,7 +10271,7 @@
                           </a:solidFill>
                           <a:latin typeface="Roboto"/>
                         </a:rPr>
-                        <a:t>$47,375</a:t>
+                        <a:t>$55,975</a:t>
                       </a:r>
                     </a:p>
                   </a:txBody>
@@ -10298,7 +10298,7 @@
                           </a:solidFill>
                           <a:latin typeface="Roboto"/>
                         </a:rPr>
-                        <a:t>59.6%</a:t>
+                        <a:t>63.6%</a:t>
                       </a:r>
                     </a:p>
                   </a:txBody>
@@ -10354,7 +10354,7 @@
                           </a:solidFill>
                           <a:latin typeface="Roboto"/>
                         </a:rPr>
-                        <a:t>$32,500</a:t>
+                        <a:t>$35,700</a:t>
                       </a:r>
                     </a:p>
                   </a:txBody>
@@ -10381,7 +10381,7 @@
                           </a:solidFill>
                           <a:latin typeface="Roboto"/>
                         </a:rPr>
-                        <a:t>$16,300</a:t>
+                        <a:t>$17,900</a:t>
                       </a:r>
                     </a:p>
                   </a:txBody>
@@ -10435,7 +10435,7 @@
                           </a:solidFill>
                           <a:latin typeface="Roboto"/>
                         </a:rPr>
-                        <a:t>$19,600</a:t>
+                        <a:t>$22,800</a:t>
                       </a:r>
                     </a:p>
                   </a:txBody>
@@ -10462,7 +10462,7 @@
                           </a:solidFill>
                           <a:latin typeface="Roboto"/>
                         </a:rPr>
-                        <a:t>60.3%</a:t>
+                        <a:t>63.9%</a:t>
                       </a:r>
                     </a:p>
                   </a:txBody>
@@ -10518,7 +10518,7 @@
                           </a:solidFill>
                           <a:latin typeface="Roboto"/>
                         </a:rPr>
-                        <a:t>$8,800</a:t>
+                        <a:t>$9,700</a:t>
                       </a:r>
                     </a:p>
                   </a:txBody>
@@ -10545,7 +10545,7 @@
                           </a:solidFill>
                           <a:latin typeface="Roboto"/>
                         </a:rPr>
-                        <a:t>$5,200</a:t>
+                        <a:t>$5,700</a:t>
                       </a:r>
                     </a:p>
                   </a:txBody>
@@ -10572,7 +10572,7 @@
                           </a:solidFill>
                           <a:latin typeface="Roboto"/>
                         </a:rPr>
-                        <a:t>69.2%</a:t>
+                        <a:t>70.2%</a:t>
                       </a:r>
                     </a:p>
                   </a:txBody>
@@ -10599,7 +10599,7 @@
                           </a:solidFill>
                           <a:latin typeface="Roboto"/>
                         </a:rPr>
-                        <a:t>$6,100</a:t>
+                        <a:t>$7,000</a:t>
                       </a:r>
                     </a:p>
                   </a:txBody>
@@ -10626,7 +10626,7 @@
                           </a:solidFill>
                           <a:latin typeface="Roboto"/>
                         </a:rPr>
-                        <a:t>69.3%</a:t>
+                        <a:t>72.2%</a:t>
                       </a:r>
                     </a:p>
                   </a:txBody>
@@ -10682,7 +10682,7 @@
                           </a:solidFill>
                           <a:latin typeface="Roboto"/>
                         </a:rPr>
-                        <a:t>$120,755</a:t>
+                        <a:t>$133,455</a:t>
                       </a:r>
                     </a:p>
                   </a:txBody>
@@ -10709,7 +10709,7 @@
                           </a:solidFill>
                           <a:latin typeface="Roboto"/>
                         </a:rPr>
-                        <a:t>$86,320</a:t>
+                        <a:t>$94,805</a:t>
                       </a:r>
                     </a:p>
                   </a:txBody>
@@ -10736,7 +10736,7 @@
                           </a:solidFill>
                           <a:latin typeface="Roboto"/>
                         </a:rPr>
-                        <a:t>39.9%</a:t>
+                        <a:t>40.8%</a:t>
                       </a:r>
                     </a:p>
                   </a:txBody>
@@ -10763,7 +10763,7 @@
                           </a:solidFill>
                           <a:latin typeface="Roboto"/>
                         </a:rPr>
-                        <a:t>$73,075</a:t>
+                        <a:t>$85,775</a:t>
                       </a:r>
                     </a:p>
                   </a:txBody>
@@ -10790,7 +10790,7 @@
                           </a:solidFill>
                           <a:latin typeface="Roboto"/>
                         </a:rPr>
-                        <a:t>60.5%</a:t>
+                        <a:t>64.3%</a:t>
                       </a:r>
                     </a:p>
                   </a:txBody>
@@ -10878,7 +10878,7 @@
                 </a:solidFill>
                 <a:latin typeface="Roboto"/>
               </a:rPr>
-              <a:t>Data retrieved 2pm, Tue 6 Oct 2026 · Generated 8 Oct 2026, 9:35am · Sample data · Made with Python (python-pptx)</a:t>
+              <a:t>Data retrieved 2pm, Tue 6 Oct 2026 · Generated 9 Oct 2026, 8:41am · Sample data · Made with Python (python-pptx)</a:t>
             </a:r>
           </a:p>
         </p:txBody>
